--- a/tuning/earring_spatial_search/SAE_earring_results.pptx
+++ b/tuning/earring_spatial_search/SAE_earring_results.pptx
@@ -431,7 +431,7 @@
 </file>
 
 <file path=ppt/slides/slide3.xml><?xml version="1.0" encoding="utf-8"?>
-<p:sld xmlns:a="http://schemas.openxmlformats.org/drawingml/2006/main" xmlns:r="http://schemas.openxmlformats.org/officeDocument/2006/relationships" xmlns:p="http://schemas.openxmlformats.org/presentationml/2006/main">
+<p:sld xmlns:a="http://schemas.openxmlformats.org/drawingml/2006/main" xmlns:p="http://schemas.openxmlformats.org/presentationml/2006/main">
   <p:cSld>
     <p:bg>
       <p:bgPr>
@@ -488,7 +488,7 @@
                 <a:ea typeface="Arial"/>
                 <a:cs typeface="Arial"/>
               </a:rPr>
-              <a:t>How I chose features</a:t>
+              <a:t>Feature scores did not hold up on validation</a:t>
             </a:r>
             <a:endParaRPr lang="en-US" sz="3000"/>
           </a:p>
@@ -527,7 +527,7 @@
                 <a:ea typeface="Arial"/>
                 <a:cs typeface="Arial"/>
               </a:rPr>
-              <a:t>I ranked features using the training images, then tested the top three on held-out images.</a:t>
+              <a:t>Feature 4858: AUC 0.670 on training images, 0.448 on validation.</a:t>
             </a:r>
             <a:endParaRPr lang="en-US" sz="2000"/>
           </a:p>
@@ -566,7 +566,7 @@
                 <a:ea typeface="Arial"/>
                 <a:cs typeface="Arial"/>
               </a:rPr>
-              <a:t>Feature 4858 ranked first, but its validation AUC was 0.448, close to chance.</a:t>
+              <a:t>Features 766 and 1237: validation AUC 0.562 and 0.500.</a:t>
             </a:r>
             <a:endParaRPr lang="en-US" sz="2000"/>
           </a:p>
@@ -605,7 +605,7 @@
                 <a:ea typeface="Arial"/>
                 <a:cs typeface="Arial"/>
               </a:rPr>
-              <a:t>The other two candidates were inactive in most validation boxes.</a:t>
+              <a:t>AUC near 0.50 means weak separation. Labels were automatic and unreviewed.</a:t>
             </a:r>
             <a:endParaRPr lang="en-US" sz="2000"/>
           </a:p>
@@ -620,7 +620,7 @@
 </file>
 
 <file path=ppt/slides/slide4.xml><?xml version="1.0" encoding="utf-8"?>
-<p:sld xmlns:a="http://schemas.openxmlformats.org/drawingml/2006/main" xmlns:r="http://schemas.openxmlformats.org/officeDocument/2006/relationships" xmlns:p="http://schemas.openxmlformats.org/presentationml/2006/main">
+<p:sld xmlns:a="http://schemas.openxmlformats.org/drawingml/2006/main" xmlns:p="http://schemas.openxmlformats.org/presentationml/2006/main" xmlns:r="http://schemas.openxmlformats.org/officeDocument/2006/relationships">
   <p:cSld>
     <p:bg>
       <p:bgPr>
@@ -692,31 +692,31 @@
         <p:spPr>
           <a:xfrm>
             <a:off x="762000" y="1905000"/>
-            <a:ext cx="10668000" cy="1050000"/>
-          </a:xfrm>
-          <a:prstGeom prst="rect">
-            <a:avLst/>
-          </a:prstGeom>
-          <a:noFill/>
-          <a:ln>
-            <a:noFill/>
-          </a:ln>
-        </p:spPr>
-        <p:txBody>
-          <a:bodyPr wrap="square" lIns="0" tIns="0" rIns="0" bIns="0" anchor="t"/>
-          <a:lstStyle/>
-          <a:p>
-            <a:pPr algn="l"/>
-            <a:r>
-              <a:rPr lang="en-US" sz="2000">
-                <a:solidFill>
-                  <a:srgbClr val="000000"/>
-                </a:solidFill>
-                <a:latin typeface="Arial"/>
-                <a:ea typeface="Arial"/>
-                <a:cs typeface="Arial"/>
-              </a:rPr>
-              <a:t>Feature 4858 changed pixels in all eight validation images with detected earrings.</a:t>
+            <a:ext cx="6248400" cy="1050000"/>
+          </a:xfrm>
+          <a:prstGeom prst="rect">
+            <a:avLst/>
+          </a:prstGeom>
+          <a:noFill/>
+          <a:ln>
+            <a:noFill/>
+          </a:ln>
+        </p:spPr>
+        <p:txBody>
+          <a:bodyPr wrap="square" lIns="0" tIns="0" rIns="0" bIns="0" anchor="t"/>
+          <a:lstStyle/>
+          <a:p>
+            <a:pPr algn="l"/>
+            <a:r>
+              <a:rPr lang="en-US" sz="2000">
+                <a:solidFill>
+                  <a:srgbClr val="000000"/>
+                </a:solidFill>
+                <a:latin typeface="Arial"/>
+                <a:ea typeface="Arial"/>
+                <a:cs typeface="Arial"/>
+              </a:rPr>
+              <a:t>Feature 4858 changed the image, but the earring remained.</a:t>
             </a:r>
             <a:endParaRPr lang="en-US" sz="2000"/>
           </a:p>
@@ -731,31 +731,31 @@
         <p:spPr>
           <a:xfrm>
             <a:off x="762000" y="3155000"/>
-            <a:ext cx="10668000" cy="1050000"/>
-          </a:xfrm>
-          <a:prstGeom prst="rect">
-            <a:avLst/>
-          </a:prstGeom>
-          <a:noFill/>
-          <a:ln>
-            <a:noFill/>
-          </a:ln>
-        </p:spPr>
-        <p:txBody>
-          <a:bodyPr wrap="square" lIns="0" tIns="0" rIns="0" bIns="0" anchor="t"/>
-          <a:lstStyle/>
-          <a:p>
-            <a:pPr algn="l"/>
-            <a:r>
-              <a:rPr lang="en-US" sz="2000">
-                <a:solidFill>
-                  <a:srgbClr val="000000"/>
-                </a:solidFill>
-                <a:latin typeface="Arial"/>
-                <a:ea typeface="Arial"/>
-                <a:cs typeface="Arial"/>
-              </a:rPr>
-              <a:t>The earrings still remained in the images I inspected.</a:t>
+            <a:ext cx="6248400" cy="1050000"/>
+          </a:xfrm>
+          <a:prstGeom prst="rect">
+            <a:avLst/>
+          </a:prstGeom>
+          <a:noFill/>
+          <a:ln>
+            <a:noFill/>
+          </a:ln>
+        </p:spPr>
+        <p:txBody>
+          <a:bodyPr wrap="square" lIns="0" tIns="0" rIns="0" bIns="0" anchor="t"/>
+          <a:lstStyle/>
+          <a:p>
+            <a:pPr algn="l"/>
+            <a:r>
+              <a:rPr lang="en-US" sz="2000">
+                <a:solidFill>
+                  <a:srgbClr val="000000"/>
+                </a:solidFill>
+                <a:latin typeface="Arial"/>
+                <a:ea typeface="Arial"/>
+                <a:cs typeface="Arial"/>
+              </a:rPr>
+              <a:t>Features 766 and 1237 usually made no change.</a:t>
             </a:r>
             <a:endParaRPr lang="en-US" sz="2000"/>
           </a:p>
@@ -770,36 +770,60 @@
         <p:spPr>
           <a:xfrm>
             <a:off x="762000" y="4405000"/>
-            <a:ext cx="10668000" cy="1050000"/>
-          </a:xfrm>
-          <a:prstGeom prst="rect">
-            <a:avLst/>
-          </a:prstGeom>
-          <a:noFill/>
-          <a:ln>
-            <a:noFill/>
-          </a:ln>
-        </p:spPr>
-        <p:txBody>
-          <a:bodyPr wrap="square" lIns="0" tIns="0" rIns="0" bIns="0" anchor="t"/>
-          <a:lstStyle/>
-          <a:p>
-            <a:pPr algn="l"/>
-            <a:r>
-              <a:rPr lang="en-US" sz="2000">
-                <a:solidFill>
-                  <a:srgbClr val="000000"/>
-                </a:solidFill>
-                <a:latin typeface="Arial"/>
-                <a:ea typeface="Arial"/>
-                <a:cs typeface="Arial"/>
-              </a:rPr>
-              <a:t>Features 766 and 1237 usually made no change. A random feature was included as a control.</a:t>
-            </a:r>
-            <a:endParaRPr lang="en-US" sz="2000"/>
-          </a:p>
-        </p:txBody>
-      </p:sp>
+            <a:ext cx="6248400" cy="1050000"/>
+          </a:xfrm>
+          <a:prstGeom prst="rect">
+            <a:avLst/>
+          </a:prstGeom>
+          <a:noFill/>
+          <a:ln>
+            <a:noFill/>
+          </a:ln>
+        </p:spPr>
+        <p:txBody>
+          <a:bodyPr wrap="square" lIns="0" tIns="0" rIns="0" bIns="0" anchor="t"/>
+          <a:lstStyle/>
+          <a:p>
+            <a:pPr algn="l"/>
+            <a:r>
+              <a:rPr lang="en-US" sz="2000">
+                <a:solidFill>
+                  <a:srgbClr val="000000"/>
+                </a:solidFill>
+                <a:latin typeface="Arial"/>
+                <a:ea typeface="Arial"/>
+                <a:cs typeface="Arial"/>
+              </a:rPr>
+              <a:t>Pixel change by itself does not show that the target object was removed.</a:t>
+            </a:r>
+            <a:endParaRPr lang="en-US" sz="2000"/>
+          </a:p>
+        </p:txBody>
+      </p:sp>
+      <p:pic>
+        <p:nvPicPr>
+          <p:cNvPr id="20" name="Held-out earring comparison"/>
+          <p:cNvPicPr>
+            <a:picLocks noChangeAspect="1"/>
+          </p:cNvPicPr>
+          <p:nvPr/>
+        </p:nvPicPr>
+        <p:blipFill>
+          <a:blip r:embed="rId2"/>
+          <a:stretch>
+            <a:fillRect/>
+          </a:stretch>
+        </p:blipFill>
+        <p:spPr>
+          <a:xfrm>
+            <a:off x="7406640" y="1645920"/>
+            <a:ext cx="4219700" cy="4846320"/>
+          </a:xfrm>
+          <a:prstGeom prst="rect">
+            <a:avLst/>
+          </a:prstGeom>
+        </p:spPr>
+      </p:pic>
     </p:spTree>
   </p:cSld>
   <p:clrMapOvr>
